--- a/08-Kubernetes/session6/08-Ingress-AWS-LBC.pptx
+++ b/08-Kubernetes/session6/08-Ingress-AWS-LBC.pptx
@@ -1644,8 +1644,8 @@
         </p:blipFill>
         <p:spPr>
           <a:xfrm>
-            <a:off x="3977640" y="685800"/>
-            <a:ext cx="1188720" cy="1188720"/>
+            <a:off x="4080793" y="788953"/>
+            <a:ext cx="982414" cy="982414"/>
           </a:xfrm>
           <a:prstGeom prst="rect">
             <a:avLst/>
